--- a/effect-tests/multi-style-pptx-v1/pptx/future-tech.pptx
+++ b/effect-tests/multi-style-pptx-v1/pptx/future-tech.pptx
@@ -900,8 +900,8 @@
         </p:nvSpPr>
         <p:spPr>
           <a:xfrm>
-            <a:off x="713232" y="694944"/>
-            <a:ext cx="5074920" cy="658368"/>
+            <a:off x="713232" y="658368"/>
+            <a:ext cx="4617720" cy="603504"/>
           </a:xfrm>
           <a:prstGeom prst="rect">
             <a:avLst/>
@@ -955,8 +955,8 @@
         </p:nvSpPr>
         <p:spPr>
           <a:xfrm>
-            <a:off x="749808" y="1399032"/>
-            <a:ext cx="4709160" cy="310896"/>
+            <a:off x="749808" y="1298448"/>
+            <a:ext cx="4251960" cy="310896"/>
           </a:xfrm>
           <a:prstGeom prst="rect">
             <a:avLst/>
@@ -990,82 +990,14 @@
       </p:sp>
       <p:sp>
         <p:nvSpPr>
-          <p:cNvPr id="5" name="Shape 2"/>
-          <p:cNvSpPr/>
-          <p:nvPr/>
-        </p:nvSpPr>
-        <p:spPr>
-          <a:xfrm>
-            <a:off x="749808" y="1956816"/>
-            <a:ext cx="420624" cy="420624"/>
-          </a:xfrm>
-          <a:prstGeom prst="ellipse">
-            <a:avLst/>
-          </a:prstGeom>
-          <a:solidFill>
-            <a:srgbClr val="2BD3FF">
-              <a:alpha val="92000"/>
-            </a:srgbClr>
-          </a:solidFill>
-          <a:ln w="12700">
-            <a:solidFill>
-              <a:srgbClr val="FFFFFF">
-                <a:alpha val="88000"/>
-              </a:srgbClr>
-            </a:solidFill>
-            <a:prstDash val="solid"/>
-          </a:ln>
-        </p:spPr>
-      </p:sp>
-      <p:sp>
-        <p:nvSpPr>
-          <p:cNvPr id="6" name="Text 3"/>
-          <p:cNvSpPr/>
-          <p:nvPr/>
-        </p:nvSpPr>
-        <p:spPr>
-          <a:xfrm>
-            <a:off x="749808" y="2066544"/>
-            <a:ext cx="420624" cy="146304"/>
-          </a:xfrm>
-          <a:prstGeom prst="rect">
-            <a:avLst/>
-          </a:prstGeom>
-          <a:noFill/>
-          <a:ln/>
-        </p:spPr>
-        <p:txBody>
-          <a:bodyPr wrap="square" lIns="0" tIns="0" rIns="0" bIns="0" rtlCol="0" anchor="ctr"/>
-          <a:lstStyle/>
-          <a:p>
-            <a:pPr algn="ctr" indent="0" marL="0">
-              <a:buNone/>
-            </a:pPr>
-            <a:r>
-              <a:rPr lang="en-US" sz="720" b="1" dirty="0">
-                <a:solidFill>
-                  <a:srgbClr val="FFFFFF"/>
-                </a:solidFill>
-                <a:latin typeface="PingFang SC" pitchFamily="34" charset="0"/>
-                <a:ea typeface="PingFang SC" pitchFamily="34" charset="-122"/>
-                <a:cs typeface="PingFang SC" pitchFamily="34" charset="-120"/>
-              </a:rPr>
-              <a:t>01</a:t>
-            </a:r>
-            <a:endParaRPr lang="en-US" sz="720" dirty="0"/>
-          </a:p>
-        </p:txBody>
-      </p:sp>
-      <p:sp>
-        <p:nvSpPr>
-          <p:cNvPr id="7" name="Text 4"/>
-          <p:cNvSpPr/>
-          <p:nvPr/>
-        </p:nvSpPr>
-        <p:spPr>
-          <a:xfrm>
-            <a:off x="1408176" y="1956816"/>
-            <a:ext cx="4059936" cy="256032"/>
+          <p:cNvPr id="5" name="Text 2"/>
+          <p:cNvSpPr/>
+          <p:nvPr/>
+        </p:nvSpPr>
+        <p:spPr>
+          <a:xfrm>
+            <a:off x="5074920" y="896112"/>
+            <a:ext cx="4251960" cy="329184"/>
           </a:xfrm>
           <a:prstGeom prst="rect">
             <a:avLst/>
@@ -1083,7 +1015,7 @@
               <a:buNone/>
             </a:pPr>
             <a:r>
-              <a:rPr lang="en-US" sz="1200" b="1" dirty="0">
+              <a:rPr lang="en-US" sz="1180" b="1" dirty="0">
                 <a:solidFill>
                   <a:srgbClr val="F5F9FF"/>
                 </a:solidFill>
@@ -1091,796 +1023,6 @@
                 <a:ea typeface="PingFang SC" pitchFamily="34" charset="-122"/>
                 <a:cs typeface="PingFang SC" pitchFamily="34" charset="-120"/>
               </a:rPr>
-              <a:t>应用从单点工具转向业务流程</a:t>
-            </a:r>
-            <a:endParaRPr lang="en-US" sz="1200" dirty="0"/>
-          </a:p>
-        </p:txBody>
-      </p:sp>
-      <p:sp>
-        <p:nvSpPr>
-          <p:cNvPr id="8" name="Text 5"/>
-          <p:cNvSpPr/>
-          <p:nvPr/>
-        </p:nvSpPr>
-        <p:spPr>
-          <a:xfrm>
-            <a:off x="1408176" y="2267712"/>
-            <a:ext cx="4059936" cy="201168"/>
-          </a:xfrm>
-          <a:prstGeom prst="rect">
-            <a:avLst/>
-          </a:prstGeom>
-          <a:noFill/>
-          <a:ln/>
-        </p:spPr>
-        <p:txBody>
-          <a:bodyPr wrap="square" lIns="0" tIns="0" rIns="0" bIns="0" rtlCol="0" anchor="ctr">
-            <a:normAutofit/>
-          </a:bodyPr>
-          <a:lstStyle/>
-          <a:p>
-            <a:pPr indent="0" marL="0">
-              <a:buNone/>
-            </a:pPr>
-            <a:r>
-              <a:rPr lang="en-US" sz="820" dirty="0">
-                <a:solidFill>
-                  <a:srgbClr val="B8C8DE"/>
-                </a:solidFill>
-                <a:latin typeface="PingFang SC" pitchFamily="34" charset="0"/>
-                <a:ea typeface="PingFang SC" pitchFamily="34" charset="-122"/>
-                <a:cs typeface="PingFang SC" pitchFamily="34" charset="-120"/>
-              </a:rPr>
-              <a:t>AI 开始进入客服、营销、研发、知识库等连续链路，价值不再停留在个人提效。</a:t>
-            </a:r>
-            <a:endParaRPr lang="en-US" sz="820" dirty="0"/>
-          </a:p>
-        </p:txBody>
-      </p:sp>
-      <p:sp>
-        <p:nvSpPr>
-          <p:cNvPr id="9" name="Shape 6"/>
-          <p:cNvSpPr/>
-          <p:nvPr/>
-        </p:nvSpPr>
-        <p:spPr>
-          <a:xfrm>
-            <a:off x="749808" y="2633472"/>
-            <a:ext cx="420624" cy="420624"/>
-          </a:xfrm>
-          <a:prstGeom prst="ellipse">
-            <a:avLst/>
-          </a:prstGeom>
-          <a:solidFill>
-            <a:srgbClr val="8D6BFF">
-              <a:alpha val="92000"/>
-            </a:srgbClr>
-          </a:solidFill>
-          <a:ln w="12700">
-            <a:solidFill>
-              <a:srgbClr val="FFFFFF">
-                <a:alpha val="88000"/>
-              </a:srgbClr>
-            </a:solidFill>
-            <a:prstDash val="solid"/>
-          </a:ln>
-        </p:spPr>
-      </p:sp>
-      <p:sp>
-        <p:nvSpPr>
-          <p:cNvPr id="10" name="Text 7"/>
-          <p:cNvSpPr/>
-          <p:nvPr/>
-        </p:nvSpPr>
-        <p:spPr>
-          <a:xfrm>
-            <a:off x="749808" y="2743200"/>
-            <a:ext cx="420624" cy="146304"/>
-          </a:xfrm>
-          <a:prstGeom prst="rect">
-            <a:avLst/>
-          </a:prstGeom>
-          <a:noFill/>
-          <a:ln/>
-        </p:spPr>
-        <p:txBody>
-          <a:bodyPr wrap="square" lIns="0" tIns="0" rIns="0" bIns="0" rtlCol="0" anchor="ctr"/>
-          <a:lstStyle/>
-          <a:p>
-            <a:pPr algn="ctr" indent="0" marL="0">
-              <a:buNone/>
-            </a:pPr>
-            <a:r>
-              <a:rPr lang="en-US" sz="720" b="1" dirty="0">
-                <a:solidFill>
-                  <a:srgbClr val="FFFFFF"/>
-                </a:solidFill>
-                <a:latin typeface="PingFang SC" pitchFamily="34" charset="0"/>
-                <a:ea typeface="PingFang SC" pitchFamily="34" charset="-122"/>
-                <a:cs typeface="PingFang SC" pitchFamily="34" charset="-120"/>
-              </a:rPr>
-              <a:t>02</a:t>
-            </a:r>
-            <a:endParaRPr lang="en-US" sz="720" dirty="0"/>
-          </a:p>
-        </p:txBody>
-      </p:sp>
-      <p:sp>
-        <p:nvSpPr>
-          <p:cNvPr id="11" name="Text 8"/>
-          <p:cNvSpPr/>
-          <p:nvPr/>
-        </p:nvSpPr>
-        <p:spPr>
-          <a:xfrm>
-            <a:off x="1408176" y="2633472"/>
-            <a:ext cx="4059936" cy="256032"/>
-          </a:xfrm>
-          <a:prstGeom prst="rect">
-            <a:avLst/>
-          </a:prstGeom>
-          <a:noFill/>
-          <a:ln/>
-        </p:spPr>
-        <p:txBody>
-          <a:bodyPr wrap="square" lIns="0" tIns="0" rIns="0" bIns="0" rtlCol="0" anchor="ctr">
-            <a:normAutofit/>
-          </a:bodyPr>
-          <a:lstStyle/>
-          <a:p>
-            <a:pPr indent="0" marL="0">
-              <a:buNone/>
-            </a:pPr>
-            <a:r>
-              <a:rPr lang="en-US" sz="1200" b="1" dirty="0">
-                <a:solidFill>
-                  <a:srgbClr val="F5F9FF"/>
-                </a:solidFill>
-                <a:latin typeface="PingFang SC" pitchFamily="34" charset="0"/>
-                <a:ea typeface="PingFang SC" pitchFamily="34" charset="-122"/>
-                <a:cs typeface="PingFang SC" pitchFamily="34" charset="-120"/>
-              </a:rPr>
-              <a:t>数据与治理成为商业化分水岭</a:t>
-            </a:r>
-            <a:endParaRPr lang="en-US" sz="1200" dirty="0"/>
-          </a:p>
-        </p:txBody>
-      </p:sp>
-      <p:sp>
-        <p:nvSpPr>
-          <p:cNvPr id="12" name="Text 9"/>
-          <p:cNvSpPr/>
-          <p:nvPr/>
-        </p:nvSpPr>
-        <p:spPr>
-          <a:xfrm>
-            <a:off x="1408176" y="2944368"/>
-            <a:ext cx="4059936" cy="201168"/>
-          </a:xfrm>
-          <a:prstGeom prst="rect">
-            <a:avLst/>
-          </a:prstGeom>
-          <a:noFill/>
-          <a:ln/>
-        </p:spPr>
-        <p:txBody>
-          <a:bodyPr wrap="square" lIns="0" tIns="0" rIns="0" bIns="0" rtlCol="0" anchor="ctr">
-            <a:normAutofit/>
-          </a:bodyPr>
-          <a:lstStyle/>
-          <a:p>
-            <a:pPr indent="0" marL="0">
-              <a:buNone/>
-            </a:pPr>
-            <a:r>
-              <a:rPr lang="en-US" sz="820" dirty="0">
-                <a:solidFill>
-                  <a:srgbClr val="B8C8DE"/>
-                </a:solidFill>
-                <a:latin typeface="PingFang SC" pitchFamily="34" charset="0"/>
-                <a:ea typeface="PingFang SC" pitchFamily="34" charset="-122"/>
-                <a:cs typeface="PingFang SC" pitchFamily="34" charset="-120"/>
-              </a:rPr>
-              <a:t>权限、审查、知识沉淀和指标口径决定 AI 能否被稳定复制到更多团队。</a:t>
-            </a:r>
-            <a:endParaRPr lang="en-US" sz="820" dirty="0"/>
-          </a:p>
-        </p:txBody>
-      </p:sp>
-      <p:sp>
-        <p:nvSpPr>
-          <p:cNvPr id="13" name="Shape 10"/>
-          <p:cNvSpPr/>
-          <p:nvPr/>
-        </p:nvSpPr>
-        <p:spPr>
-          <a:xfrm>
-            <a:off x="749808" y="3310128"/>
-            <a:ext cx="420624" cy="420624"/>
-          </a:xfrm>
-          <a:prstGeom prst="ellipse">
-            <a:avLst/>
-          </a:prstGeom>
-          <a:solidFill>
-            <a:srgbClr val="16E0B3">
-              <a:alpha val="92000"/>
-            </a:srgbClr>
-          </a:solidFill>
-          <a:ln w="12700">
-            <a:solidFill>
-              <a:srgbClr val="FFFFFF">
-                <a:alpha val="88000"/>
-              </a:srgbClr>
-            </a:solidFill>
-            <a:prstDash val="solid"/>
-          </a:ln>
-        </p:spPr>
-      </p:sp>
-      <p:sp>
-        <p:nvSpPr>
-          <p:cNvPr id="14" name="Text 11"/>
-          <p:cNvSpPr/>
-          <p:nvPr/>
-        </p:nvSpPr>
-        <p:spPr>
-          <a:xfrm>
-            <a:off x="749808" y="3419856"/>
-            <a:ext cx="420624" cy="146304"/>
-          </a:xfrm>
-          <a:prstGeom prst="rect">
-            <a:avLst/>
-          </a:prstGeom>
-          <a:noFill/>
-          <a:ln/>
-        </p:spPr>
-        <p:txBody>
-          <a:bodyPr wrap="square" lIns="0" tIns="0" rIns="0" bIns="0" rtlCol="0" anchor="ctr"/>
-          <a:lstStyle/>
-          <a:p>
-            <a:pPr algn="ctr" indent="0" marL="0">
-              <a:buNone/>
-            </a:pPr>
-            <a:r>
-              <a:rPr lang="en-US" sz="720" b="1" dirty="0">
-                <a:solidFill>
-                  <a:srgbClr val="FFFFFF"/>
-                </a:solidFill>
-                <a:latin typeface="PingFang SC" pitchFamily="34" charset="0"/>
-                <a:ea typeface="PingFang SC" pitchFamily="34" charset="-122"/>
-                <a:cs typeface="PingFang SC" pitchFamily="34" charset="-120"/>
-              </a:rPr>
-              <a:t>03</a:t>
-            </a:r>
-            <a:endParaRPr lang="en-US" sz="720" dirty="0"/>
-          </a:p>
-        </p:txBody>
-      </p:sp>
-      <p:sp>
-        <p:nvSpPr>
-          <p:cNvPr id="15" name="Text 12"/>
-          <p:cNvSpPr/>
-          <p:nvPr/>
-        </p:nvSpPr>
-        <p:spPr>
-          <a:xfrm>
-            <a:off x="1408176" y="3310128"/>
-            <a:ext cx="4059936" cy="256032"/>
-          </a:xfrm>
-          <a:prstGeom prst="rect">
-            <a:avLst/>
-          </a:prstGeom>
-          <a:noFill/>
-          <a:ln/>
-        </p:spPr>
-        <p:txBody>
-          <a:bodyPr wrap="square" lIns="0" tIns="0" rIns="0" bIns="0" rtlCol="0" anchor="ctr">
-            <a:normAutofit/>
-          </a:bodyPr>
-          <a:lstStyle/>
-          <a:p>
-            <a:pPr indent="0" marL="0">
-              <a:buNone/>
-            </a:pPr>
-            <a:r>
-              <a:rPr lang="en-US" sz="1200" b="1" dirty="0">
-                <a:solidFill>
-                  <a:srgbClr val="F5F9FF"/>
-                </a:solidFill>
-                <a:latin typeface="PingFang SC" pitchFamily="34" charset="0"/>
-                <a:ea typeface="PingFang SC" pitchFamily="34" charset="-122"/>
-                <a:cs typeface="PingFang SC" pitchFamily="34" charset="-120"/>
-              </a:rPr>
-              <a:t>管理层关注从热度转向回报</a:t>
-            </a:r>
-            <a:endParaRPr lang="en-US" sz="1200" dirty="0"/>
-          </a:p>
-        </p:txBody>
-      </p:sp>
-      <p:sp>
-        <p:nvSpPr>
-          <p:cNvPr id="16" name="Text 13"/>
-          <p:cNvSpPr/>
-          <p:nvPr/>
-        </p:nvSpPr>
-        <p:spPr>
-          <a:xfrm>
-            <a:off x="1408176" y="3621024"/>
-            <a:ext cx="4059936" cy="201168"/>
-          </a:xfrm>
-          <a:prstGeom prst="rect">
-            <a:avLst/>
-          </a:prstGeom>
-          <a:noFill/>
-          <a:ln/>
-        </p:spPr>
-        <p:txBody>
-          <a:bodyPr wrap="square" lIns="0" tIns="0" rIns="0" bIns="0" rtlCol="0" anchor="ctr">
-            <a:normAutofit/>
-          </a:bodyPr>
-          <a:lstStyle/>
-          <a:p>
-            <a:pPr indent="0" marL="0">
-              <a:buNone/>
-            </a:pPr>
-            <a:r>
-              <a:rPr lang="en-US" sz="820" dirty="0">
-                <a:solidFill>
-                  <a:srgbClr val="B8C8DE"/>
-                </a:solidFill>
-                <a:latin typeface="PingFang SC" pitchFamily="34" charset="0"/>
-                <a:ea typeface="PingFang SC" pitchFamily="34" charset="-122"/>
-                <a:cs typeface="PingFang SC" pitchFamily="34" charset="-120"/>
-              </a:rPr>
-              <a:t>2026 年的关键问题会变成周期缩短、质量稳定和组织学习速度。</a:t>
-            </a:r>
-            <a:endParaRPr lang="en-US" sz="820" dirty="0"/>
-          </a:p>
-        </p:txBody>
-      </p:sp>
-      <p:sp>
-        <p:nvSpPr>
-          <p:cNvPr id="17" name="Shape 14"/>
-          <p:cNvSpPr/>
-          <p:nvPr/>
-        </p:nvSpPr>
-        <p:spPr>
-          <a:xfrm>
-            <a:off x="365760" y="4782312"/>
-            <a:ext cx="5367528" cy="0"/>
-          </a:xfrm>
-          <a:prstGeom prst="line">
-            <a:avLst/>
-          </a:prstGeom>
-          <a:noFill/>
-          <a:ln w="12700">
-            <a:solidFill>
-              <a:srgbClr val="456B9D">
-                <a:alpha val="55000"/>
-              </a:srgbClr>
-            </a:solidFill>
-            <a:prstDash val="solid"/>
-          </a:ln>
-        </p:spPr>
-      </p:sp>
-      <p:sp>
-        <p:nvSpPr>
-          <p:cNvPr id="18" name="Text 15"/>
-          <p:cNvSpPr/>
-          <p:nvPr/>
-        </p:nvSpPr>
-        <p:spPr>
-          <a:xfrm>
-            <a:off x="822960" y="5010912"/>
-            <a:ext cx="1331976" cy="365760"/>
-          </a:xfrm>
-          <a:prstGeom prst="rect">
-            <a:avLst/>
-          </a:prstGeom>
-          <a:noFill/>
-          <a:ln/>
-        </p:spPr>
-        <p:txBody>
-          <a:bodyPr wrap="square" lIns="0" tIns="0" rIns="0" bIns="0" rtlCol="0" anchor="ctr">
-            <a:normAutofit/>
-          </a:bodyPr>
-          <a:lstStyle/>
-          <a:p>
-            <a:pPr algn="ctr" indent="0" marL="0">
-              <a:buNone/>
-            </a:pPr>
-            <a:r>
-              <a:rPr lang="en-US" sz="1900" b="1" dirty="0">
-                <a:solidFill>
-                  <a:srgbClr val="2BD3FF"/>
-                </a:solidFill>
-                <a:latin typeface="PingFang SC" pitchFamily="34" charset="0"/>
-                <a:ea typeface="PingFang SC" pitchFamily="34" charset="-122"/>
-                <a:cs typeface="PingFang SC" pitchFamily="34" charset="-120"/>
-              </a:rPr>
-              <a:t>68%</a:t>
-            </a:r>
-            <a:endParaRPr lang="en-US" sz="1900" dirty="0"/>
-          </a:p>
-        </p:txBody>
-      </p:sp>
-      <p:sp>
-        <p:nvSpPr>
-          <p:cNvPr id="19" name="Text 16"/>
-          <p:cNvSpPr/>
-          <p:nvPr/>
-        </p:nvSpPr>
-        <p:spPr>
-          <a:xfrm>
-            <a:off x="822960" y="5422392"/>
-            <a:ext cx="1331976" cy="201168"/>
-          </a:xfrm>
-          <a:prstGeom prst="rect">
-            <a:avLst/>
-          </a:prstGeom>
-          <a:noFill/>
-          <a:ln/>
-        </p:spPr>
-        <p:txBody>
-          <a:bodyPr wrap="square" lIns="0" tIns="0" rIns="0" bIns="0" rtlCol="0" anchor="ctr">
-            <a:normAutofit/>
-          </a:bodyPr>
-          <a:lstStyle/>
-          <a:p>
-            <a:pPr algn="ctr" indent="0" marL="0">
-              <a:buNone/>
-            </a:pPr>
-            <a:r>
-              <a:rPr lang="en-US" sz="720" b="1" dirty="0">
-                <a:solidFill>
-                  <a:srgbClr val="D8E6F8"/>
-                </a:solidFill>
-                <a:latin typeface="PingFang SC" pitchFamily="34" charset="0"/>
-                <a:ea typeface="PingFang SC" pitchFamily="34" charset="-122"/>
-                <a:cs typeface="PingFang SC" pitchFamily="34" charset="-120"/>
-              </a:rPr>
-              <a:t>流程嵌入</a:t>
-            </a:r>
-            <a:endParaRPr lang="en-US" sz="720" dirty="0"/>
-          </a:p>
-        </p:txBody>
-      </p:sp>
-      <p:sp>
-        <p:nvSpPr>
-          <p:cNvPr id="20" name="Shape 17"/>
-          <p:cNvSpPr/>
-          <p:nvPr/>
-        </p:nvSpPr>
-        <p:spPr>
-          <a:xfrm>
-            <a:off x="1411224" y="5678424"/>
-            <a:ext cx="292608" cy="292608"/>
-          </a:xfrm>
-          <a:prstGeom prst="ellipse">
-            <a:avLst/>
-          </a:prstGeom>
-          <a:solidFill>
-            <a:srgbClr val="2BD3FF">
-              <a:alpha val="42000"/>
-            </a:srgbClr>
-          </a:solidFill>
-          <a:ln w="12700">
-            <a:solidFill>
-              <a:srgbClr val="FFFFFF">
-                <a:alpha val="80000"/>
-              </a:srgbClr>
-            </a:solidFill>
-            <a:prstDash val="solid"/>
-          </a:ln>
-        </p:spPr>
-      </p:sp>
-      <p:sp>
-        <p:nvSpPr>
-          <p:cNvPr id="21" name="Shape 18"/>
-          <p:cNvSpPr/>
-          <p:nvPr/>
-        </p:nvSpPr>
-        <p:spPr>
-          <a:xfrm>
-            <a:off x="2182368" y="5065776"/>
-            <a:ext cx="0" cy="749808"/>
-          </a:xfrm>
-          <a:prstGeom prst="line">
-            <a:avLst/>
-          </a:prstGeom>
-          <a:noFill/>
-          <a:ln w="12700">
-            <a:solidFill>
-              <a:srgbClr val="456B9D">
-                <a:alpha val="48000"/>
-              </a:srgbClr>
-            </a:solidFill>
-            <a:prstDash val="solid"/>
-          </a:ln>
-        </p:spPr>
-      </p:sp>
-      <p:sp>
-        <p:nvSpPr>
-          <p:cNvPr id="22" name="Text 19"/>
-          <p:cNvSpPr/>
-          <p:nvPr/>
-        </p:nvSpPr>
-        <p:spPr>
-          <a:xfrm>
-            <a:off x="2292096" y="5010912"/>
-            <a:ext cx="1331976" cy="365760"/>
-          </a:xfrm>
-          <a:prstGeom prst="rect">
-            <a:avLst/>
-          </a:prstGeom>
-          <a:noFill/>
-          <a:ln/>
-        </p:spPr>
-        <p:txBody>
-          <a:bodyPr wrap="square" lIns="0" tIns="0" rIns="0" bIns="0" rtlCol="0" anchor="ctr">
-            <a:normAutofit/>
-          </a:bodyPr>
-          <a:lstStyle/>
-          <a:p>
-            <a:pPr algn="ctr" indent="0" marL="0">
-              <a:buNone/>
-            </a:pPr>
-            <a:r>
-              <a:rPr lang="en-US" sz="1900" b="1" dirty="0">
-                <a:solidFill>
-                  <a:srgbClr val="8D6BFF"/>
-                </a:solidFill>
-                <a:latin typeface="PingFang SC" pitchFamily="34" charset="0"/>
-                <a:ea typeface="PingFang SC" pitchFamily="34" charset="-122"/>
-                <a:cs typeface="PingFang SC" pitchFamily="34" charset="-120"/>
-              </a:rPr>
-              <a:t>2.4x</a:t>
-            </a:r>
-            <a:endParaRPr lang="en-US" sz="1900" dirty="0"/>
-          </a:p>
-        </p:txBody>
-      </p:sp>
-      <p:sp>
-        <p:nvSpPr>
-          <p:cNvPr id="23" name="Text 20"/>
-          <p:cNvSpPr/>
-          <p:nvPr/>
-        </p:nvSpPr>
-        <p:spPr>
-          <a:xfrm>
-            <a:off x="2292096" y="5422392"/>
-            <a:ext cx="1331976" cy="201168"/>
-          </a:xfrm>
-          <a:prstGeom prst="rect">
-            <a:avLst/>
-          </a:prstGeom>
-          <a:noFill/>
-          <a:ln/>
-        </p:spPr>
-        <p:txBody>
-          <a:bodyPr wrap="square" lIns="0" tIns="0" rIns="0" bIns="0" rtlCol="0" anchor="ctr">
-            <a:normAutofit/>
-          </a:bodyPr>
-          <a:lstStyle/>
-          <a:p>
-            <a:pPr algn="ctr" indent="0" marL="0">
-              <a:buNone/>
-            </a:pPr>
-            <a:r>
-              <a:rPr lang="en-US" sz="720" b="1" dirty="0">
-                <a:solidFill>
-                  <a:srgbClr val="D8E6F8"/>
-                </a:solidFill>
-                <a:latin typeface="PingFang SC" pitchFamily="34" charset="0"/>
-                <a:ea typeface="PingFang SC" pitchFamily="34" charset="-122"/>
-                <a:cs typeface="PingFang SC" pitchFamily="34" charset="-120"/>
-              </a:rPr>
-              <a:t>协同提效</a:t>
-            </a:r>
-            <a:endParaRPr lang="en-US" sz="720" dirty="0"/>
-          </a:p>
-        </p:txBody>
-      </p:sp>
-      <p:sp>
-        <p:nvSpPr>
-          <p:cNvPr id="24" name="Shape 21"/>
-          <p:cNvSpPr/>
-          <p:nvPr/>
-        </p:nvSpPr>
-        <p:spPr>
-          <a:xfrm>
-            <a:off x="2880360" y="5678424"/>
-            <a:ext cx="292608" cy="292608"/>
-          </a:xfrm>
-          <a:prstGeom prst="ellipse">
-            <a:avLst/>
-          </a:prstGeom>
-          <a:solidFill>
-            <a:srgbClr val="8D6BFF">
-              <a:alpha val="42000"/>
-            </a:srgbClr>
-          </a:solidFill>
-          <a:ln w="12700">
-            <a:solidFill>
-              <a:srgbClr val="FFFFFF">
-                <a:alpha val="80000"/>
-              </a:srgbClr>
-            </a:solidFill>
-            <a:prstDash val="solid"/>
-          </a:ln>
-        </p:spPr>
-      </p:sp>
-      <p:sp>
-        <p:nvSpPr>
-          <p:cNvPr id="25" name="Shape 22"/>
-          <p:cNvSpPr/>
-          <p:nvPr/>
-        </p:nvSpPr>
-        <p:spPr>
-          <a:xfrm>
-            <a:off x="3651504" y="5065776"/>
-            <a:ext cx="0" cy="749808"/>
-          </a:xfrm>
-          <a:prstGeom prst="line">
-            <a:avLst/>
-          </a:prstGeom>
-          <a:noFill/>
-          <a:ln w="12700">
-            <a:solidFill>
-              <a:srgbClr val="456B9D">
-                <a:alpha val="48000"/>
-              </a:srgbClr>
-            </a:solidFill>
-            <a:prstDash val="solid"/>
-          </a:ln>
-        </p:spPr>
-      </p:sp>
-      <p:sp>
-        <p:nvSpPr>
-          <p:cNvPr id="26" name="Text 23"/>
-          <p:cNvSpPr/>
-          <p:nvPr/>
-        </p:nvSpPr>
-        <p:spPr>
-          <a:xfrm>
-            <a:off x="3761232" y="5010912"/>
-            <a:ext cx="1331976" cy="365760"/>
-          </a:xfrm>
-          <a:prstGeom prst="rect">
-            <a:avLst/>
-          </a:prstGeom>
-          <a:noFill/>
-          <a:ln/>
-        </p:spPr>
-        <p:txBody>
-          <a:bodyPr wrap="square" lIns="0" tIns="0" rIns="0" bIns="0" rtlCol="0" anchor="ctr">
-            <a:normAutofit/>
-          </a:bodyPr>
-          <a:lstStyle/>
-          <a:p>
-            <a:pPr algn="ctr" indent="0" marL="0">
-              <a:buNone/>
-            </a:pPr>
-            <a:r>
-              <a:rPr lang="en-US" sz="1900" b="1" dirty="0">
-                <a:solidFill>
-                  <a:srgbClr val="16E0B3"/>
-                </a:solidFill>
-                <a:latin typeface="PingFang SC" pitchFamily="34" charset="0"/>
-                <a:ea typeface="PingFang SC" pitchFamily="34" charset="-122"/>
-                <a:cs typeface="PingFang SC" pitchFamily="34" charset="-120"/>
-              </a:rPr>
-              <a:t>2026</a:t>
-            </a:r>
-            <a:endParaRPr lang="en-US" sz="1900" dirty="0"/>
-          </a:p>
-        </p:txBody>
-      </p:sp>
-      <p:sp>
-        <p:nvSpPr>
-          <p:cNvPr id="27" name="Text 24"/>
-          <p:cNvSpPr/>
-          <p:nvPr/>
-        </p:nvSpPr>
-        <p:spPr>
-          <a:xfrm>
-            <a:off x="3761232" y="5422392"/>
-            <a:ext cx="1331976" cy="201168"/>
-          </a:xfrm>
-          <a:prstGeom prst="rect">
-            <a:avLst/>
-          </a:prstGeom>
-          <a:noFill/>
-          <a:ln/>
-        </p:spPr>
-        <p:txBody>
-          <a:bodyPr wrap="square" lIns="0" tIns="0" rIns="0" bIns="0" rtlCol="0" anchor="ctr">
-            <a:normAutofit/>
-          </a:bodyPr>
-          <a:lstStyle/>
-          <a:p>
-            <a:pPr algn="ctr" indent="0" marL="0">
-              <a:buNone/>
-            </a:pPr>
-            <a:r>
-              <a:rPr lang="en-US" sz="720" b="1" dirty="0">
-                <a:solidFill>
-                  <a:srgbClr val="D8E6F8"/>
-                </a:solidFill>
-                <a:latin typeface="PingFang SC" pitchFamily="34" charset="0"/>
-                <a:ea typeface="PingFang SC" pitchFamily="34" charset="-122"/>
-                <a:cs typeface="PingFang SC" pitchFamily="34" charset="-120"/>
-              </a:rPr>
-              <a:t>规模窗口</a:t>
-            </a:r>
-            <a:endParaRPr lang="en-US" sz="720" dirty="0"/>
-          </a:p>
-        </p:txBody>
-      </p:sp>
-      <p:sp>
-        <p:nvSpPr>
-          <p:cNvPr id="28" name="Shape 25"/>
-          <p:cNvSpPr/>
-          <p:nvPr/>
-        </p:nvSpPr>
-        <p:spPr>
-          <a:xfrm>
-            <a:off x="4349496" y="5678424"/>
-            <a:ext cx="292608" cy="292608"/>
-          </a:xfrm>
-          <a:prstGeom prst="ellipse">
-            <a:avLst/>
-          </a:prstGeom>
-          <a:solidFill>
-            <a:srgbClr val="16E0B3">
-              <a:alpha val="42000"/>
-            </a:srgbClr>
-          </a:solidFill>
-          <a:ln w="12700">
-            <a:solidFill>
-              <a:srgbClr val="FFFFFF">
-                <a:alpha val="80000"/>
-              </a:srgbClr>
-            </a:solidFill>
-            <a:prstDash val="solid"/>
-          </a:ln>
-        </p:spPr>
-      </p:sp>
-      <p:sp>
-        <p:nvSpPr>
-          <p:cNvPr id="29" name="Text 26"/>
-          <p:cNvSpPr/>
-          <p:nvPr/>
-        </p:nvSpPr>
-        <p:spPr>
-          <a:xfrm>
-            <a:off x="6272784" y="969264"/>
-            <a:ext cx="3703320" cy="365760"/>
-          </a:xfrm>
-          <a:prstGeom prst="rect">
-            <a:avLst/>
-          </a:prstGeom>
-          <a:noFill/>
-          <a:ln/>
-        </p:spPr>
-        <p:txBody>
-          <a:bodyPr wrap="square" lIns="0" tIns="0" rIns="0" bIns="0" rtlCol="0" anchor="ctr">
-            <a:normAutofit/>
-          </a:bodyPr>
-          <a:lstStyle/>
-          <a:p>
-            <a:pPr indent="0" marL="0">
-              <a:buNone/>
-            </a:pPr>
-            <a:r>
-              <a:rPr lang="en-US" sz="1180" b="1" dirty="0">
-                <a:solidFill>
-                  <a:srgbClr val="F5F9FF"/>
-                </a:solidFill>
-                <a:latin typeface="PingFang SC" pitchFamily="34" charset="0"/>
-                <a:ea typeface="PingFang SC" pitchFamily="34" charset="-122"/>
-                <a:cs typeface="PingFang SC" pitchFamily="34" charset="-120"/>
-              </a:rPr>
               <a:t>企业 AI 应用成熟度指数</a:t>
             </a:r>
             <a:endParaRPr lang="en-US" sz="1180" dirty="0"/>
@@ -1889,13 +1031,13 @@
       </p:sp>
       <p:sp>
         <p:nvSpPr>
-          <p:cNvPr id="30" name="Shape 27"/>
-          <p:cNvSpPr/>
-          <p:nvPr/>
-        </p:nvSpPr>
-        <p:spPr>
-          <a:xfrm>
-            <a:off x="6272784" y="1353312"/>
+          <p:cNvPr id="6" name="Shape 3"/>
+          <p:cNvSpPr/>
+          <p:nvPr/>
+        </p:nvSpPr>
+        <p:spPr>
+          <a:xfrm>
+            <a:off x="5074920" y="1280160"/>
             <a:ext cx="292608" cy="0"/>
           </a:xfrm>
           <a:prstGeom prst="line">
@@ -1912,14 +1054,14 @@
       </p:sp>
       <p:sp>
         <p:nvSpPr>
-          <p:cNvPr id="31" name="Shape 28"/>
-          <p:cNvSpPr/>
-          <p:nvPr/>
-        </p:nvSpPr>
-        <p:spPr>
-          <a:xfrm>
-            <a:off x="6492240" y="4270248"/>
-            <a:ext cx="3721608" cy="0"/>
+          <p:cNvPr id="7" name="Shape 4"/>
+          <p:cNvSpPr/>
+          <p:nvPr/>
+        </p:nvSpPr>
+        <p:spPr>
+          <a:xfrm>
+            <a:off x="5166360" y="4572000"/>
+            <a:ext cx="4453128" cy="0"/>
           </a:xfrm>
           <a:prstGeom prst="line">
             <a:avLst/>
@@ -1937,13 +1079,13 @@
       </p:sp>
       <p:sp>
         <p:nvSpPr>
-          <p:cNvPr id="32" name="Text 29"/>
-          <p:cNvSpPr/>
-          <p:nvPr/>
-        </p:nvSpPr>
-        <p:spPr>
-          <a:xfrm>
-            <a:off x="6163056" y="4206240"/>
+          <p:cNvPr id="8" name="Text 5"/>
+          <p:cNvSpPr/>
+          <p:nvPr/>
+        </p:nvSpPr>
+        <p:spPr>
+          <a:xfrm>
+            <a:off x="4837176" y="4507992"/>
             <a:ext cx="228600" cy="109728"/>
           </a:xfrm>
           <a:prstGeom prst="rect">
@@ -1976,14 +1118,14 @@
       </p:sp>
       <p:sp>
         <p:nvSpPr>
-          <p:cNvPr id="33" name="Shape 30"/>
-          <p:cNvSpPr/>
-          <p:nvPr/>
-        </p:nvSpPr>
-        <p:spPr>
-          <a:xfrm>
-            <a:off x="6492240" y="3646170"/>
-            <a:ext cx="3721608" cy="0"/>
+          <p:cNvPr id="9" name="Shape 6"/>
+          <p:cNvSpPr/>
+          <p:nvPr/>
+        </p:nvSpPr>
+        <p:spPr>
+          <a:xfrm>
+            <a:off x="5166360" y="3863340"/>
+            <a:ext cx="4453128" cy="0"/>
           </a:xfrm>
           <a:prstGeom prst="line">
             <a:avLst/>
@@ -2001,13 +1143,13 @@
       </p:sp>
       <p:sp>
         <p:nvSpPr>
-          <p:cNvPr id="34" name="Text 31"/>
-          <p:cNvSpPr/>
-          <p:nvPr/>
-        </p:nvSpPr>
-        <p:spPr>
-          <a:xfrm>
-            <a:off x="6163056" y="3582162"/>
+          <p:cNvPr id="10" name="Text 7"/>
+          <p:cNvSpPr/>
+          <p:nvPr/>
+        </p:nvSpPr>
+        <p:spPr>
+          <a:xfrm>
+            <a:off x="4837176" y="3799332"/>
             <a:ext cx="228600" cy="109728"/>
           </a:xfrm>
           <a:prstGeom prst="rect">
@@ -2040,14 +1182,14 @@
       </p:sp>
       <p:sp>
         <p:nvSpPr>
-          <p:cNvPr id="35" name="Shape 32"/>
-          <p:cNvSpPr/>
-          <p:nvPr/>
-        </p:nvSpPr>
-        <p:spPr>
-          <a:xfrm>
-            <a:off x="6492240" y="3022092"/>
-            <a:ext cx="3721608" cy="0"/>
+          <p:cNvPr id="11" name="Shape 8"/>
+          <p:cNvSpPr/>
+          <p:nvPr/>
+        </p:nvSpPr>
+        <p:spPr>
+          <a:xfrm>
+            <a:off x="5166360" y="3154680"/>
+            <a:ext cx="4453128" cy="0"/>
           </a:xfrm>
           <a:prstGeom prst="line">
             <a:avLst/>
@@ -2065,13 +1207,13 @@
       </p:sp>
       <p:sp>
         <p:nvSpPr>
-          <p:cNvPr id="36" name="Text 33"/>
-          <p:cNvSpPr/>
-          <p:nvPr/>
-        </p:nvSpPr>
-        <p:spPr>
-          <a:xfrm>
-            <a:off x="6163056" y="2958084"/>
+          <p:cNvPr id="12" name="Text 9"/>
+          <p:cNvSpPr/>
+          <p:nvPr/>
+        </p:nvSpPr>
+        <p:spPr>
+          <a:xfrm>
+            <a:off x="4837176" y="3090672"/>
             <a:ext cx="228600" cy="109728"/>
           </a:xfrm>
           <a:prstGeom prst="rect">
@@ -2104,14 +1246,14 @@
       </p:sp>
       <p:sp>
         <p:nvSpPr>
-          <p:cNvPr id="37" name="Shape 34"/>
-          <p:cNvSpPr/>
-          <p:nvPr/>
-        </p:nvSpPr>
-        <p:spPr>
-          <a:xfrm>
-            <a:off x="6492240" y="2398014"/>
-            <a:ext cx="3721608" cy="0"/>
+          <p:cNvPr id="13" name="Shape 10"/>
+          <p:cNvSpPr/>
+          <p:nvPr/>
+        </p:nvSpPr>
+        <p:spPr>
+          <a:xfrm>
+            <a:off x="5166360" y="2446020"/>
+            <a:ext cx="4453128" cy="0"/>
           </a:xfrm>
           <a:prstGeom prst="line">
             <a:avLst/>
@@ -2129,13 +1271,13 @@
       </p:sp>
       <p:sp>
         <p:nvSpPr>
-          <p:cNvPr id="38" name="Text 35"/>
-          <p:cNvSpPr/>
-          <p:nvPr/>
-        </p:nvSpPr>
-        <p:spPr>
-          <a:xfrm>
-            <a:off x="6163056" y="2334006"/>
+          <p:cNvPr id="14" name="Text 11"/>
+          <p:cNvSpPr/>
+          <p:nvPr/>
+        </p:nvSpPr>
+        <p:spPr>
+          <a:xfrm>
+            <a:off x="4837176" y="2382012"/>
             <a:ext cx="228600" cy="109728"/>
           </a:xfrm>
           <a:prstGeom prst="rect">
@@ -2168,14 +1310,14 @@
       </p:sp>
       <p:sp>
         <p:nvSpPr>
-          <p:cNvPr id="39" name="Shape 36"/>
-          <p:cNvSpPr/>
-          <p:nvPr/>
-        </p:nvSpPr>
-        <p:spPr>
-          <a:xfrm>
-            <a:off x="6492240" y="1773936"/>
-            <a:ext cx="3721608" cy="0"/>
+          <p:cNvPr id="15" name="Shape 12"/>
+          <p:cNvSpPr/>
+          <p:nvPr/>
+        </p:nvSpPr>
+        <p:spPr>
+          <a:xfrm>
+            <a:off x="5166360" y="1737360"/>
+            <a:ext cx="4453128" cy="0"/>
           </a:xfrm>
           <a:prstGeom prst="line">
             <a:avLst/>
@@ -2193,13 +1335,13 @@
       </p:sp>
       <p:sp>
         <p:nvSpPr>
-          <p:cNvPr id="40" name="Text 37"/>
-          <p:cNvSpPr/>
-          <p:nvPr/>
-        </p:nvSpPr>
-        <p:spPr>
-          <a:xfrm>
-            <a:off x="6163056" y="1709928"/>
+          <p:cNvPr id="16" name="Text 13"/>
+          <p:cNvSpPr/>
+          <p:nvPr/>
+        </p:nvSpPr>
+        <p:spPr>
+          <a:xfrm>
+            <a:off x="4837176" y="1673352"/>
             <a:ext cx="228600" cy="109728"/>
           </a:xfrm>
           <a:prstGeom prst="rect">
@@ -2232,14 +1374,14 @@
       </p:sp>
       <p:sp>
         <p:nvSpPr>
-          <p:cNvPr id="41" name="Shape 38"/>
-          <p:cNvSpPr/>
-          <p:nvPr/>
-        </p:nvSpPr>
-        <p:spPr>
-          <a:xfrm>
-            <a:off x="6791043" y="3001244"/>
-            <a:ext cx="332796" cy="1269004"/>
+          <p:cNvPr id="17" name="Shape 14"/>
+          <p:cNvSpPr/>
+          <p:nvPr/>
+        </p:nvSpPr>
+        <p:spPr>
+          <a:xfrm>
+            <a:off x="5503568" y="3120299"/>
+            <a:ext cx="438866" cy="1451701"/>
           </a:xfrm>
           <a:prstGeom prst="rect">
             <a:avLst/>
@@ -2261,14 +1403,14 @@
       </p:sp>
       <p:sp>
         <p:nvSpPr>
-          <p:cNvPr id="42" name="Text 39"/>
-          <p:cNvSpPr/>
-          <p:nvPr/>
-        </p:nvSpPr>
-        <p:spPr>
-          <a:xfrm>
-            <a:off x="6681315" y="2763500"/>
-            <a:ext cx="552252" cy="164592"/>
+          <p:cNvPr id="18" name="Text 15"/>
+          <p:cNvSpPr/>
+          <p:nvPr/>
+        </p:nvSpPr>
+        <p:spPr>
+          <a:xfrm>
+            <a:off x="5393840" y="2882555"/>
+            <a:ext cx="658322" cy="164592"/>
           </a:xfrm>
           <a:prstGeom prst="rect">
             <a:avLst/>
@@ -2302,14 +1444,14 @@
       </p:sp>
       <p:sp>
         <p:nvSpPr>
-          <p:cNvPr id="43" name="Text 40"/>
-          <p:cNvSpPr/>
-          <p:nvPr/>
-        </p:nvSpPr>
-        <p:spPr>
-          <a:xfrm>
-            <a:off x="6519672" y="4398264"/>
-            <a:ext cx="875538" cy="310896"/>
+          <p:cNvPr id="19" name="Text 16"/>
+          <p:cNvSpPr/>
+          <p:nvPr/>
+        </p:nvSpPr>
+        <p:spPr>
+          <a:xfrm>
+            <a:off x="5193792" y="4700016"/>
+            <a:ext cx="1058418" cy="310896"/>
           </a:xfrm>
           <a:prstGeom prst="rect">
             <a:avLst/>
@@ -2360,14 +1502,14 @@
       </p:sp>
       <p:sp>
         <p:nvSpPr>
-          <p:cNvPr id="44" name="Shape 41"/>
-          <p:cNvSpPr/>
-          <p:nvPr/>
-        </p:nvSpPr>
-        <p:spPr>
-          <a:xfrm>
-            <a:off x="7721445" y="2672243"/>
-            <a:ext cx="332796" cy="1598005"/>
+          <p:cNvPr id="20" name="Shape 17"/>
+          <p:cNvSpPr/>
+          <p:nvPr/>
+        </p:nvSpPr>
+        <p:spPr>
+          <a:xfrm>
+            <a:off x="6616850" y="2743932"/>
+            <a:ext cx="438866" cy="1828068"/>
           </a:xfrm>
           <a:prstGeom prst="rect">
             <a:avLst/>
@@ -2389,14 +1531,14 @@
       </p:sp>
       <p:sp>
         <p:nvSpPr>
-          <p:cNvPr id="45" name="Text 42"/>
-          <p:cNvSpPr/>
-          <p:nvPr/>
-        </p:nvSpPr>
-        <p:spPr>
-          <a:xfrm>
-            <a:off x="7611717" y="2434499"/>
-            <a:ext cx="552252" cy="164592"/>
+          <p:cNvPr id="21" name="Text 18"/>
+          <p:cNvSpPr/>
+          <p:nvPr/>
+        </p:nvSpPr>
+        <p:spPr>
+          <a:xfrm>
+            <a:off x="6507122" y="2506188"/>
+            <a:ext cx="658322" cy="164592"/>
           </a:xfrm>
           <a:prstGeom prst="rect">
             <a:avLst/>
@@ -2430,14 +1572,14 @@
       </p:sp>
       <p:sp>
         <p:nvSpPr>
-          <p:cNvPr id="46" name="Text 43"/>
-          <p:cNvSpPr/>
-          <p:nvPr/>
-        </p:nvSpPr>
-        <p:spPr>
-          <a:xfrm>
-            <a:off x="7450074" y="4398264"/>
-            <a:ext cx="875538" cy="310896"/>
+          <p:cNvPr id="22" name="Text 19"/>
+          <p:cNvSpPr/>
+          <p:nvPr/>
+        </p:nvSpPr>
+        <p:spPr>
+          <a:xfrm>
+            <a:off x="6307074" y="4700016"/>
+            <a:ext cx="1058418" cy="310896"/>
           </a:xfrm>
           <a:prstGeom prst="rect">
             <a:avLst/>
@@ -2488,14 +1630,14 @@
       </p:sp>
       <p:sp>
         <p:nvSpPr>
-          <p:cNvPr id="47" name="Shape 44"/>
-          <p:cNvSpPr/>
-          <p:nvPr/>
-        </p:nvSpPr>
-        <p:spPr>
-          <a:xfrm>
-            <a:off x="8651847" y="2484242"/>
-            <a:ext cx="332796" cy="1786006"/>
+          <p:cNvPr id="23" name="Shape 20"/>
+          <p:cNvSpPr/>
+          <p:nvPr/>
+        </p:nvSpPr>
+        <p:spPr>
+          <a:xfrm>
+            <a:off x="7730132" y="2528865"/>
+            <a:ext cx="438866" cy="2043135"/>
           </a:xfrm>
           <a:prstGeom prst="rect">
             <a:avLst/>
@@ -2517,14 +1659,14 @@
       </p:sp>
       <p:sp>
         <p:nvSpPr>
-          <p:cNvPr id="48" name="Text 45"/>
-          <p:cNvSpPr/>
-          <p:nvPr/>
-        </p:nvSpPr>
-        <p:spPr>
-          <a:xfrm>
-            <a:off x="8542119" y="2246498"/>
-            <a:ext cx="552252" cy="164592"/>
+          <p:cNvPr id="24" name="Text 21"/>
+          <p:cNvSpPr/>
+          <p:nvPr/>
+        </p:nvSpPr>
+        <p:spPr>
+          <a:xfrm>
+            <a:off x="7620404" y="2291121"/>
+            <a:ext cx="658322" cy="164592"/>
           </a:xfrm>
           <a:prstGeom prst="rect">
             <a:avLst/>
@@ -2558,14 +1700,14 @@
       </p:sp>
       <p:sp>
         <p:nvSpPr>
-          <p:cNvPr id="49" name="Text 46"/>
-          <p:cNvSpPr/>
-          <p:nvPr/>
-        </p:nvSpPr>
-        <p:spPr>
-          <a:xfrm>
-            <a:off x="8380476" y="4398264"/>
-            <a:ext cx="875538" cy="310896"/>
+          <p:cNvPr id="25" name="Text 22"/>
+          <p:cNvSpPr/>
+          <p:nvPr/>
+        </p:nvSpPr>
+        <p:spPr>
+          <a:xfrm>
+            <a:off x="7420356" y="4700016"/>
+            <a:ext cx="1058418" cy="310896"/>
           </a:xfrm>
           <a:prstGeom prst="rect">
             <a:avLst/>
@@ -2616,14 +1758,14 @@
       </p:sp>
       <p:sp>
         <p:nvSpPr>
-          <p:cNvPr id="50" name="Shape 47"/>
-          <p:cNvSpPr/>
-          <p:nvPr/>
-        </p:nvSpPr>
-        <p:spPr>
-          <a:xfrm>
-            <a:off x="9582249" y="2131741"/>
-            <a:ext cx="332796" cy="2138507"/>
+          <p:cNvPr id="26" name="Shape 23"/>
+          <p:cNvSpPr/>
+          <p:nvPr/>
+        </p:nvSpPr>
+        <p:spPr>
+          <a:xfrm>
+            <a:off x="8843414" y="2125614"/>
+            <a:ext cx="438866" cy="2446386"/>
           </a:xfrm>
           <a:prstGeom prst="rect">
             <a:avLst/>
@@ -2645,14 +1787,14 @@
       </p:sp>
       <p:sp>
         <p:nvSpPr>
-          <p:cNvPr id="51" name="Text 48"/>
-          <p:cNvSpPr/>
-          <p:nvPr/>
-        </p:nvSpPr>
-        <p:spPr>
-          <a:xfrm>
-            <a:off x="9472521" y="1893997"/>
-            <a:ext cx="552252" cy="164592"/>
+          <p:cNvPr id="27" name="Text 24"/>
+          <p:cNvSpPr/>
+          <p:nvPr/>
+        </p:nvSpPr>
+        <p:spPr>
+          <a:xfrm>
+            <a:off x="8733686" y="1887870"/>
+            <a:ext cx="658322" cy="164592"/>
           </a:xfrm>
           <a:prstGeom prst="rect">
             <a:avLst/>
@@ -2686,14 +1828,14 @@
       </p:sp>
       <p:sp>
         <p:nvSpPr>
-          <p:cNvPr id="52" name="Text 49"/>
-          <p:cNvSpPr/>
-          <p:nvPr/>
-        </p:nvSpPr>
-        <p:spPr>
-          <a:xfrm>
-            <a:off x="9310878" y="4398264"/>
-            <a:ext cx="875538" cy="310896"/>
+          <p:cNvPr id="28" name="Text 25"/>
+          <p:cNvSpPr/>
+          <p:nvPr/>
+        </p:nvSpPr>
+        <p:spPr>
+          <a:xfrm>
+            <a:off x="8533638" y="4700016"/>
+            <a:ext cx="1058418" cy="310896"/>
           </a:xfrm>
           <a:prstGeom prst="rect">
             <a:avLst/>
@@ -2744,14 +1886,14 @@
       </p:sp>
       <p:sp>
         <p:nvSpPr>
-          <p:cNvPr id="53" name="Shape 50"/>
-          <p:cNvSpPr/>
-          <p:nvPr/>
-        </p:nvSpPr>
-        <p:spPr>
-          <a:xfrm>
-            <a:off x="6957441" y="3147548"/>
-            <a:ext cx="930402" cy="-329001"/>
+          <p:cNvPr id="29" name="Shape 26"/>
+          <p:cNvSpPr/>
+          <p:nvPr/>
+        </p:nvSpPr>
+        <p:spPr>
+          <a:xfrm>
+            <a:off x="5723001" y="3266603"/>
+            <a:ext cx="1113282" cy="-376367"/>
           </a:xfrm>
           <a:prstGeom prst="line">
             <a:avLst/>
@@ -2767,14 +1909,14 @@
       </p:sp>
       <p:sp>
         <p:nvSpPr>
-          <p:cNvPr id="54" name="Shape 51"/>
-          <p:cNvSpPr/>
-          <p:nvPr/>
-        </p:nvSpPr>
-        <p:spPr>
-          <a:xfrm>
-            <a:off x="7887843" y="2818547"/>
-            <a:ext cx="930402" cy="-188001"/>
+          <p:cNvPr id="30" name="Shape 27"/>
+          <p:cNvSpPr/>
+          <p:nvPr/>
+        </p:nvSpPr>
+        <p:spPr>
+          <a:xfrm>
+            <a:off x="6836283" y="2890236"/>
+            <a:ext cx="1113282" cy="-215067"/>
           </a:xfrm>
           <a:prstGeom prst="line">
             <a:avLst/>
@@ -2790,14 +1932,14 @@
       </p:sp>
       <p:sp>
         <p:nvSpPr>
-          <p:cNvPr id="55" name="Shape 52"/>
-          <p:cNvSpPr/>
-          <p:nvPr/>
-        </p:nvSpPr>
-        <p:spPr>
-          <a:xfrm>
-            <a:off x="8818245" y="2630546"/>
-            <a:ext cx="930402" cy="-352501"/>
+          <p:cNvPr id="31" name="Shape 28"/>
+          <p:cNvSpPr/>
+          <p:nvPr/>
+        </p:nvSpPr>
+        <p:spPr>
+          <a:xfrm>
+            <a:off x="7949565" y="2675169"/>
+            <a:ext cx="1113282" cy="-403250"/>
           </a:xfrm>
           <a:prstGeom prst="line">
             <a:avLst/>
@@ -2813,13 +1955,13 @@
       </p:sp>
       <p:sp>
         <p:nvSpPr>
-          <p:cNvPr id="56" name="Shape 53"/>
-          <p:cNvSpPr/>
-          <p:nvPr/>
-        </p:nvSpPr>
-        <p:spPr>
-          <a:xfrm>
-            <a:off x="6902577" y="3092684"/>
+          <p:cNvPr id="32" name="Shape 29"/>
+          <p:cNvSpPr/>
+          <p:nvPr/>
+        </p:nvSpPr>
+        <p:spPr>
+          <a:xfrm>
+            <a:off x="5668137" y="3211739"/>
             <a:ext cx="109728" cy="109728"/>
           </a:xfrm>
           <a:prstGeom prst="ellipse">
@@ -2838,13 +1980,13 @@
       </p:sp>
       <p:sp>
         <p:nvSpPr>
-          <p:cNvPr id="57" name="Shape 54"/>
-          <p:cNvSpPr/>
-          <p:nvPr/>
-        </p:nvSpPr>
-        <p:spPr>
-          <a:xfrm>
-            <a:off x="7832979" y="2763683"/>
+          <p:cNvPr id="33" name="Shape 30"/>
+          <p:cNvSpPr/>
+          <p:nvPr/>
+        </p:nvSpPr>
+        <p:spPr>
+          <a:xfrm>
+            <a:off x="6781419" y="2835372"/>
             <a:ext cx="109728" cy="109728"/>
           </a:xfrm>
           <a:prstGeom prst="ellipse">
@@ -2863,13 +2005,13 @@
       </p:sp>
       <p:sp>
         <p:nvSpPr>
-          <p:cNvPr id="58" name="Shape 55"/>
-          <p:cNvSpPr/>
-          <p:nvPr/>
-        </p:nvSpPr>
-        <p:spPr>
-          <a:xfrm>
-            <a:off x="8763381" y="2575682"/>
+          <p:cNvPr id="34" name="Shape 31"/>
+          <p:cNvSpPr/>
+          <p:nvPr/>
+        </p:nvSpPr>
+        <p:spPr>
+          <a:xfrm>
+            <a:off x="7894701" y="2620305"/>
             <a:ext cx="109728" cy="109728"/>
           </a:xfrm>
           <a:prstGeom prst="ellipse">
@@ -2888,13 +2030,13 @@
       </p:sp>
       <p:sp>
         <p:nvSpPr>
-          <p:cNvPr id="59" name="Shape 56"/>
-          <p:cNvSpPr/>
-          <p:nvPr/>
-        </p:nvSpPr>
-        <p:spPr>
-          <a:xfrm>
-            <a:off x="9693783" y="2223181"/>
+          <p:cNvPr id="35" name="Shape 32"/>
+          <p:cNvSpPr/>
+          <p:nvPr/>
+        </p:nvSpPr>
+        <p:spPr>
+          <a:xfrm>
+            <a:off x="9007983" y="2217054"/>
             <a:ext cx="109728" cy="109728"/>
           </a:xfrm>
           <a:prstGeom prst="ellipse">
@@ -2913,14 +2055,14 @@
       </p:sp>
       <p:sp>
         <p:nvSpPr>
-          <p:cNvPr id="60" name="Text 57"/>
-          <p:cNvSpPr/>
-          <p:nvPr/>
-        </p:nvSpPr>
-        <p:spPr>
-          <a:xfrm>
-            <a:off x="6976872" y="4800600"/>
-            <a:ext cx="3401568" cy="109728"/>
+          <p:cNvPr id="36" name="Text 33"/>
+          <p:cNvSpPr/>
+          <p:nvPr/>
+        </p:nvSpPr>
+        <p:spPr>
+          <a:xfrm>
+            <a:off x="5650992" y="5102352"/>
+            <a:ext cx="4133088" cy="109728"/>
           </a:xfrm>
           <a:prstGeom prst="rect">
             <a:avLst/>
@@ -2954,7 +2096,810 @@
       </p:sp>
       <p:sp>
         <p:nvSpPr>
-          <p:cNvPr id="61" name="Text 58"/>
+          <p:cNvPr id="37" name="Shape 34"/>
+          <p:cNvSpPr/>
+          <p:nvPr/>
+        </p:nvSpPr>
+        <p:spPr>
+          <a:xfrm>
+            <a:off x="804672" y="2029968"/>
+            <a:ext cx="0" cy="2212848"/>
+          </a:xfrm>
+          <a:prstGeom prst="line">
+            <a:avLst/>
+          </a:prstGeom>
+          <a:noFill/>
+          <a:ln w="12700">
+            <a:solidFill>
+              <a:srgbClr val="2BD3FF">
+                <a:alpha val="62000"/>
+              </a:srgbClr>
+            </a:solidFill>
+            <a:prstDash val="solid"/>
+          </a:ln>
+        </p:spPr>
+      </p:sp>
+      <p:sp>
+        <p:nvSpPr>
+          <p:cNvPr id="38" name="Shape 35"/>
+          <p:cNvSpPr/>
+          <p:nvPr/>
+        </p:nvSpPr>
+        <p:spPr>
+          <a:xfrm>
+            <a:off x="804672" y="2185416"/>
+            <a:ext cx="384048" cy="0"/>
+          </a:xfrm>
+          <a:prstGeom prst="line">
+            <a:avLst/>
+          </a:prstGeom>
+          <a:noFill/>
+          <a:ln w="12700">
+            <a:solidFill>
+              <a:srgbClr val="2BD3FF"/>
+            </a:solidFill>
+            <a:prstDash val="solid"/>
+          </a:ln>
+        </p:spPr>
+      </p:sp>
+      <p:sp>
+        <p:nvSpPr>
+          <p:cNvPr id="39" name="Text 36"/>
+          <p:cNvSpPr/>
+          <p:nvPr/>
+        </p:nvSpPr>
+        <p:spPr>
+          <a:xfrm>
+            <a:off x="1307592" y="2066544"/>
+            <a:ext cx="347472" cy="182880"/>
+          </a:xfrm>
+          <a:prstGeom prst="rect">
+            <a:avLst/>
+          </a:prstGeom>
+          <a:noFill/>
+          <a:ln/>
+        </p:spPr>
+        <p:txBody>
+          <a:bodyPr wrap="square" lIns="0" tIns="0" rIns="0" bIns="0" rtlCol="0" anchor="ctr"/>
+          <a:lstStyle/>
+          <a:p>
+            <a:pPr indent="0" marL="0">
+              <a:buNone/>
+            </a:pPr>
+            <a:r>
+              <a:rPr lang="en-US" sz="760" b="1" dirty="0">
+                <a:solidFill>
+                  <a:srgbClr val="2BD3FF"/>
+                </a:solidFill>
+                <a:latin typeface="PingFang SC" pitchFamily="34" charset="0"/>
+                <a:ea typeface="PingFang SC" pitchFamily="34" charset="-122"/>
+                <a:cs typeface="PingFang SC" pitchFamily="34" charset="-120"/>
+              </a:rPr>
+              <a:t>01</a:t>
+            </a:r>
+            <a:endParaRPr lang="en-US" sz="760" dirty="0"/>
+          </a:p>
+        </p:txBody>
+      </p:sp>
+      <p:sp>
+        <p:nvSpPr>
+          <p:cNvPr id="40" name="Text 37"/>
+          <p:cNvSpPr/>
+          <p:nvPr/>
+        </p:nvSpPr>
+        <p:spPr>
+          <a:xfrm>
+            <a:off x="1737360" y="2048256"/>
+            <a:ext cx="2359152" cy="237744"/>
+          </a:xfrm>
+          <a:prstGeom prst="rect">
+            <a:avLst/>
+          </a:prstGeom>
+          <a:noFill/>
+          <a:ln/>
+        </p:spPr>
+        <p:txBody>
+          <a:bodyPr wrap="square" lIns="0" tIns="0" rIns="0" bIns="0" rtlCol="0" anchor="ctr">
+            <a:normAutofit/>
+          </a:bodyPr>
+          <a:lstStyle/>
+          <a:p>
+            <a:pPr indent="0" marL="0">
+              <a:buNone/>
+            </a:pPr>
+            <a:r>
+              <a:rPr lang="en-US" sz="1200" b="1" dirty="0">
+                <a:solidFill>
+                  <a:srgbClr val="F5F9FF"/>
+                </a:solidFill>
+                <a:latin typeface="PingFang SC" pitchFamily="34" charset="0"/>
+                <a:ea typeface="PingFang SC" pitchFamily="34" charset="-122"/>
+                <a:cs typeface="PingFang SC" pitchFamily="34" charset="-120"/>
+              </a:rPr>
+              <a:t>应用从单点工具转向业务流程</a:t>
+            </a:r>
+            <a:endParaRPr lang="en-US" sz="1200" dirty="0"/>
+          </a:p>
+        </p:txBody>
+      </p:sp>
+      <p:sp>
+        <p:nvSpPr>
+          <p:cNvPr id="41" name="Text 38"/>
+          <p:cNvSpPr/>
+          <p:nvPr/>
+        </p:nvSpPr>
+        <p:spPr>
+          <a:xfrm>
+            <a:off x="1307592" y="2368296"/>
+            <a:ext cx="2816352" cy="219456"/>
+          </a:xfrm>
+          <a:prstGeom prst="rect">
+            <a:avLst/>
+          </a:prstGeom>
+          <a:noFill/>
+          <a:ln/>
+        </p:spPr>
+        <p:txBody>
+          <a:bodyPr wrap="square" lIns="0" tIns="0" rIns="0" bIns="0" rtlCol="0" anchor="ctr">
+            <a:normAutofit/>
+          </a:bodyPr>
+          <a:lstStyle/>
+          <a:p>
+            <a:pPr indent="0" marL="0">
+              <a:buNone/>
+            </a:pPr>
+            <a:r>
+              <a:rPr lang="en-US" sz="820" dirty="0">
+                <a:solidFill>
+                  <a:srgbClr val="B8C8DE"/>
+                </a:solidFill>
+                <a:latin typeface="PingFang SC" pitchFamily="34" charset="0"/>
+                <a:ea typeface="PingFang SC" pitchFamily="34" charset="-122"/>
+                <a:cs typeface="PingFang SC" pitchFamily="34" charset="-120"/>
+              </a:rPr>
+              <a:t>AI 开始进入客服、营销、研发、知识库等连续链路，价值不再停留在个人提效。</a:t>
+            </a:r>
+            <a:endParaRPr lang="en-US" sz="820" dirty="0"/>
+          </a:p>
+        </p:txBody>
+      </p:sp>
+      <p:sp>
+        <p:nvSpPr>
+          <p:cNvPr id="42" name="Shape 39"/>
+          <p:cNvSpPr/>
+          <p:nvPr/>
+        </p:nvSpPr>
+        <p:spPr>
+          <a:xfrm>
+            <a:off x="804672" y="2843784"/>
+            <a:ext cx="384048" cy="0"/>
+          </a:xfrm>
+          <a:prstGeom prst="line">
+            <a:avLst/>
+          </a:prstGeom>
+          <a:noFill/>
+          <a:ln w="12700">
+            <a:solidFill>
+              <a:srgbClr val="8D6BFF"/>
+            </a:solidFill>
+            <a:prstDash val="solid"/>
+          </a:ln>
+        </p:spPr>
+      </p:sp>
+      <p:sp>
+        <p:nvSpPr>
+          <p:cNvPr id="43" name="Text 40"/>
+          <p:cNvSpPr/>
+          <p:nvPr/>
+        </p:nvSpPr>
+        <p:spPr>
+          <a:xfrm>
+            <a:off x="1307592" y="2724912"/>
+            <a:ext cx="347472" cy="182880"/>
+          </a:xfrm>
+          <a:prstGeom prst="rect">
+            <a:avLst/>
+          </a:prstGeom>
+          <a:noFill/>
+          <a:ln/>
+        </p:spPr>
+        <p:txBody>
+          <a:bodyPr wrap="square" lIns="0" tIns="0" rIns="0" bIns="0" rtlCol="0" anchor="ctr"/>
+          <a:lstStyle/>
+          <a:p>
+            <a:pPr indent="0" marL="0">
+              <a:buNone/>
+            </a:pPr>
+            <a:r>
+              <a:rPr lang="en-US" sz="760" b="1" dirty="0">
+                <a:solidFill>
+                  <a:srgbClr val="8D6BFF"/>
+                </a:solidFill>
+                <a:latin typeface="PingFang SC" pitchFamily="34" charset="0"/>
+                <a:ea typeface="PingFang SC" pitchFamily="34" charset="-122"/>
+                <a:cs typeface="PingFang SC" pitchFamily="34" charset="-120"/>
+              </a:rPr>
+              <a:t>02</a:t>
+            </a:r>
+            <a:endParaRPr lang="en-US" sz="760" dirty="0"/>
+          </a:p>
+        </p:txBody>
+      </p:sp>
+      <p:sp>
+        <p:nvSpPr>
+          <p:cNvPr id="44" name="Text 41"/>
+          <p:cNvSpPr/>
+          <p:nvPr/>
+        </p:nvSpPr>
+        <p:spPr>
+          <a:xfrm>
+            <a:off x="1737360" y="2706624"/>
+            <a:ext cx="2359152" cy="237744"/>
+          </a:xfrm>
+          <a:prstGeom prst="rect">
+            <a:avLst/>
+          </a:prstGeom>
+          <a:noFill/>
+          <a:ln/>
+        </p:spPr>
+        <p:txBody>
+          <a:bodyPr wrap="square" lIns="0" tIns="0" rIns="0" bIns="0" rtlCol="0" anchor="ctr">
+            <a:normAutofit/>
+          </a:bodyPr>
+          <a:lstStyle/>
+          <a:p>
+            <a:pPr indent="0" marL="0">
+              <a:buNone/>
+            </a:pPr>
+            <a:r>
+              <a:rPr lang="en-US" sz="1200" b="1" dirty="0">
+                <a:solidFill>
+                  <a:srgbClr val="F5F9FF"/>
+                </a:solidFill>
+                <a:latin typeface="PingFang SC" pitchFamily="34" charset="0"/>
+                <a:ea typeface="PingFang SC" pitchFamily="34" charset="-122"/>
+                <a:cs typeface="PingFang SC" pitchFamily="34" charset="-120"/>
+              </a:rPr>
+              <a:t>数据与治理成为商业化分水岭</a:t>
+            </a:r>
+            <a:endParaRPr lang="en-US" sz="1200" dirty="0"/>
+          </a:p>
+        </p:txBody>
+      </p:sp>
+      <p:sp>
+        <p:nvSpPr>
+          <p:cNvPr id="45" name="Text 42"/>
+          <p:cNvSpPr/>
+          <p:nvPr/>
+        </p:nvSpPr>
+        <p:spPr>
+          <a:xfrm>
+            <a:off x="1307592" y="3026664"/>
+            <a:ext cx="2816352" cy="219456"/>
+          </a:xfrm>
+          <a:prstGeom prst="rect">
+            <a:avLst/>
+          </a:prstGeom>
+          <a:noFill/>
+          <a:ln/>
+        </p:spPr>
+        <p:txBody>
+          <a:bodyPr wrap="square" lIns="0" tIns="0" rIns="0" bIns="0" rtlCol="0" anchor="ctr">
+            <a:normAutofit/>
+          </a:bodyPr>
+          <a:lstStyle/>
+          <a:p>
+            <a:pPr indent="0" marL="0">
+              <a:buNone/>
+            </a:pPr>
+            <a:r>
+              <a:rPr lang="en-US" sz="820" dirty="0">
+                <a:solidFill>
+                  <a:srgbClr val="B8C8DE"/>
+                </a:solidFill>
+                <a:latin typeface="PingFang SC" pitchFamily="34" charset="0"/>
+                <a:ea typeface="PingFang SC" pitchFamily="34" charset="-122"/>
+                <a:cs typeface="PingFang SC" pitchFamily="34" charset="-120"/>
+              </a:rPr>
+              <a:t>权限、审查、知识沉淀和指标口径决定 AI 能否被稳定复制到更多团队。</a:t>
+            </a:r>
+            <a:endParaRPr lang="en-US" sz="820" dirty="0"/>
+          </a:p>
+        </p:txBody>
+      </p:sp>
+      <p:sp>
+        <p:nvSpPr>
+          <p:cNvPr id="46" name="Shape 43"/>
+          <p:cNvSpPr/>
+          <p:nvPr/>
+        </p:nvSpPr>
+        <p:spPr>
+          <a:xfrm>
+            <a:off x="804672" y="3502152"/>
+            <a:ext cx="384048" cy="0"/>
+          </a:xfrm>
+          <a:prstGeom prst="line">
+            <a:avLst/>
+          </a:prstGeom>
+          <a:noFill/>
+          <a:ln w="12700">
+            <a:solidFill>
+              <a:srgbClr val="16E0B3"/>
+            </a:solidFill>
+            <a:prstDash val="solid"/>
+          </a:ln>
+        </p:spPr>
+      </p:sp>
+      <p:sp>
+        <p:nvSpPr>
+          <p:cNvPr id="47" name="Text 44"/>
+          <p:cNvSpPr/>
+          <p:nvPr/>
+        </p:nvSpPr>
+        <p:spPr>
+          <a:xfrm>
+            <a:off x="1307592" y="3383280"/>
+            <a:ext cx="347472" cy="182880"/>
+          </a:xfrm>
+          <a:prstGeom prst="rect">
+            <a:avLst/>
+          </a:prstGeom>
+          <a:noFill/>
+          <a:ln/>
+        </p:spPr>
+        <p:txBody>
+          <a:bodyPr wrap="square" lIns="0" tIns="0" rIns="0" bIns="0" rtlCol="0" anchor="ctr"/>
+          <a:lstStyle/>
+          <a:p>
+            <a:pPr indent="0" marL="0">
+              <a:buNone/>
+            </a:pPr>
+            <a:r>
+              <a:rPr lang="en-US" sz="760" b="1" dirty="0">
+                <a:solidFill>
+                  <a:srgbClr val="16E0B3"/>
+                </a:solidFill>
+                <a:latin typeface="PingFang SC" pitchFamily="34" charset="0"/>
+                <a:ea typeface="PingFang SC" pitchFamily="34" charset="-122"/>
+                <a:cs typeface="PingFang SC" pitchFamily="34" charset="-120"/>
+              </a:rPr>
+              <a:t>03</a:t>
+            </a:r>
+            <a:endParaRPr lang="en-US" sz="760" dirty="0"/>
+          </a:p>
+        </p:txBody>
+      </p:sp>
+      <p:sp>
+        <p:nvSpPr>
+          <p:cNvPr id="48" name="Text 45"/>
+          <p:cNvSpPr/>
+          <p:nvPr/>
+        </p:nvSpPr>
+        <p:spPr>
+          <a:xfrm>
+            <a:off x="1737360" y="3364992"/>
+            <a:ext cx="2359152" cy="237744"/>
+          </a:xfrm>
+          <a:prstGeom prst="rect">
+            <a:avLst/>
+          </a:prstGeom>
+          <a:noFill/>
+          <a:ln/>
+        </p:spPr>
+        <p:txBody>
+          <a:bodyPr wrap="square" lIns="0" tIns="0" rIns="0" bIns="0" rtlCol="0" anchor="ctr">
+            <a:normAutofit/>
+          </a:bodyPr>
+          <a:lstStyle/>
+          <a:p>
+            <a:pPr indent="0" marL="0">
+              <a:buNone/>
+            </a:pPr>
+            <a:r>
+              <a:rPr lang="en-US" sz="1200" b="1" dirty="0">
+                <a:solidFill>
+                  <a:srgbClr val="F5F9FF"/>
+                </a:solidFill>
+                <a:latin typeface="PingFang SC" pitchFamily="34" charset="0"/>
+                <a:ea typeface="PingFang SC" pitchFamily="34" charset="-122"/>
+                <a:cs typeface="PingFang SC" pitchFamily="34" charset="-120"/>
+              </a:rPr>
+              <a:t>管理层关注从热度转向回报</a:t>
+            </a:r>
+            <a:endParaRPr lang="en-US" sz="1200" dirty="0"/>
+          </a:p>
+        </p:txBody>
+      </p:sp>
+      <p:sp>
+        <p:nvSpPr>
+          <p:cNvPr id="49" name="Text 46"/>
+          <p:cNvSpPr/>
+          <p:nvPr/>
+        </p:nvSpPr>
+        <p:spPr>
+          <a:xfrm>
+            <a:off x="1307592" y="3685032"/>
+            <a:ext cx="2816352" cy="219456"/>
+          </a:xfrm>
+          <a:prstGeom prst="rect">
+            <a:avLst/>
+          </a:prstGeom>
+          <a:noFill/>
+          <a:ln/>
+        </p:spPr>
+        <p:txBody>
+          <a:bodyPr wrap="square" lIns="0" tIns="0" rIns="0" bIns="0" rtlCol="0" anchor="ctr">
+            <a:normAutofit/>
+          </a:bodyPr>
+          <a:lstStyle/>
+          <a:p>
+            <a:pPr indent="0" marL="0">
+              <a:buNone/>
+            </a:pPr>
+            <a:r>
+              <a:rPr lang="en-US" sz="820" dirty="0">
+                <a:solidFill>
+                  <a:srgbClr val="B8C8DE"/>
+                </a:solidFill>
+                <a:latin typeface="PingFang SC" pitchFamily="34" charset="0"/>
+                <a:ea typeface="PingFang SC" pitchFamily="34" charset="-122"/>
+                <a:cs typeface="PingFang SC" pitchFamily="34" charset="-120"/>
+              </a:rPr>
+              <a:t>2026 年的关键问题会变成周期缩短、质量稳定和组织学习速度。</a:t>
+            </a:r>
+            <a:endParaRPr lang="en-US" sz="820" dirty="0"/>
+          </a:p>
+        </p:txBody>
+      </p:sp>
+      <p:sp>
+        <p:nvSpPr>
+          <p:cNvPr id="50" name="Shape 47"/>
+          <p:cNvSpPr/>
+          <p:nvPr/>
+        </p:nvSpPr>
+        <p:spPr>
+          <a:xfrm>
+            <a:off x="804672" y="5175504"/>
+            <a:ext cx="4160520" cy="0"/>
+          </a:xfrm>
+          <a:prstGeom prst="line">
+            <a:avLst/>
+          </a:prstGeom>
+          <a:noFill/>
+          <a:ln w="12700">
+            <a:solidFill>
+              <a:srgbClr val="456B9D">
+                <a:alpha val="65000"/>
+              </a:srgbClr>
+            </a:solidFill>
+            <a:prstDash val="solid"/>
+          </a:ln>
+        </p:spPr>
+      </p:sp>
+      <p:sp>
+        <p:nvSpPr>
+          <p:cNvPr id="51" name="Shape 48"/>
+          <p:cNvSpPr/>
+          <p:nvPr/>
+        </p:nvSpPr>
+        <p:spPr>
+          <a:xfrm>
+            <a:off x="804672" y="5852160"/>
+            <a:ext cx="471526" cy="0"/>
+          </a:xfrm>
+          <a:prstGeom prst="line">
+            <a:avLst/>
+          </a:prstGeom>
+          <a:noFill/>
+          <a:ln w="12700">
+            <a:solidFill>
+              <a:srgbClr val="2BD3FF">
+                <a:alpha val="88000"/>
+              </a:srgbClr>
+            </a:solidFill>
+            <a:prstDash val="solid"/>
+          </a:ln>
+        </p:spPr>
+      </p:sp>
+      <p:sp>
+        <p:nvSpPr>
+          <p:cNvPr id="52" name="Text 49"/>
+          <p:cNvSpPr/>
+          <p:nvPr/>
+        </p:nvSpPr>
+        <p:spPr>
+          <a:xfrm>
+            <a:off x="804672" y="5266944"/>
+            <a:ext cx="1277112" cy="292608"/>
+          </a:xfrm>
+          <a:prstGeom prst="rect">
+            <a:avLst/>
+          </a:prstGeom>
+          <a:noFill/>
+          <a:ln/>
+        </p:spPr>
+        <p:txBody>
+          <a:bodyPr wrap="square" lIns="0" tIns="0" rIns="0" bIns="0" rtlCol="0" anchor="ctr">
+            <a:normAutofit/>
+          </a:bodyPr>
+          <a:lstStyle/>
+          <a:p>
+            <a:pPr indent="0" marL="0">
+              <a:buNone/>
+            </a:pPr>
+            <a:r>
+              <a:rPr lang="en-US" sz="1760" b="1" dirty="0">
+                <a:solidFill>
+                  <a:srgbClr val="2BD3FF"/>
+                </a:solidFill>
+                <a:latin typeface="PingFang SC" pitchFamily="34" charset="0"/>
+                <a:ea typeface="PingFang SC" pitchFamily="34" charset="-122"/>
+                <a:cs typeface="PingFang SC" pitchFamily="34" charset="-120"/>
+              </a:rPr>
+              <a:t>68%</a:t>
+            </a:r>
+            <a:endParaRPr lang="en-US" sz="1760" dirty="0"/>
+          </a:p>
+        </p:txBody>
+      </p:sp>
+      <p:sp>
+        <p:nvSpPr>
+          <p:cNvPr id="53" name="Text 50"/>
+          <p:cNvSpPr/>
+          <p:nvPr/>
+        </p:nvSpPr>
+        <p:spPr>
+          <a:xfrm>
+            <a:off x="804672" y="5623560"/>
+            <a:ext cx="1277112" cy="164592"/>
+          </a:xfrm>
+          <a:prstGeom prst="rect">
+            <a:avLst/>
+          </a:prstGeom>
+          <a:noFill/>
+          <a:ln/>
+        </p:spPr>
+        <p:txBody>
+          <a:bodyPr wrap="square" lIns="0" tIns="0" rIns="0" bIns="0" rtlCol="0" anchor="ctr">
+            <a:normAutofit/>
+          </a:bodyPr>
+          <a:lstStyle/>
+          <a:p>
+            <a:pPr indent="0" marL="0">
+              <a:buNone/>
+            </a:pPr>
+            <a:r>
+              <a:rPr lang="en-US" sz="690" b="1" dirty="0">
+                <a:solidFill>
+                  <a:srgbClr val="D8E6F8"/>
+                </a:solidFill>
+                <a:latin typeface="PingFang SC" pitchFamily="34" charset="0"/>
+                <a:ea typeface="PingFang SC" pitchFamily="34" charset="-122"/>
+                <a:cs typeface="PingFang SC" pitchFamily="34" charset="-120"/>
+              </a:rPr>
+              <a:t>流程嵌入</a:t>
+            </a:r>
+            <a:endParaRPr lang="en-US" sz="690" dirty="0"/>
+          </a:p>
+        </p:txBody>
+      </p:sp>
+      <p:sp>
+        <p:nvSpPr>
+          <p:cNvPr id="54" name="Shape 51"/>
+          <p:cNvSpPr/>
+          <p:nvPr/>
+        </p:nvSpPr>
+        <p:spPr>
+          <a:xfrm>
+            <a:off x="2191512" y="5852160"/>
+            <a:ext cx="471526" cy="0"/>
+          </a:xfrm>
+          <a:prstGeom prst="line">
+            <a:avLst/>
+          </a:prstGeom>
+          <a:noFill/>
+          <a:ln w="12700">
+            <a:solidFill>
+              <a:srgbClr val="8D6BFF">
+                <a:alpha val="88000"/>
+              </a:srgbClr>
+            </a:solidFill>
+            <a:prstDash val="solid"/>
+          </a:ln>
+        </p:spPr>
+      </p:sp>
+      <p:sp>
+        <p:nvSpPr>
+          <p:cNvPr id="55" name="Text 52"/>
+          <p:cNvSpPr/>
+          <p:nvPr/>
+        </p:nvSpPr>
+        <p:spPr>
+          <a:xfrm>
+            <a:off x="2191512" y="5266944"/>
+            <a:ext cx="1277112" cy="292608"/>
+          </a:xfrm>
+          <a:prstGeom prst="rect">
+            <a:avLst/>
+          </a:prstGeom>
+          <a:noFill/>
+          <a:ln/>
+        </p:spPr>
+        <p:txBody>
+          <a:bodyPr wrap="square" lIns="0" tIns="0" rIns="0" bIns="0" rtlCol="0" anchor="ctr">
+            <a:normAutofit/>
+          </a:bodyPr>
+          <a:lstStyle/>
+          <a:p>
+            <a:pPr indent="0" marL="0">
+              <a:buNone/>
+            </a:pPr>
+            <a:r>
+              <a:rPr lang="en-US" sz="1760" b="1" dirty="0">
+                <a:solidFill>
+                  <a:srgbClr val="8D6BFF"/>
+                </a:solidFill>
+                <a:latin typeface="PingFang SC" pitchFamily="34" charset="0"/>
+                <a:ea typeface="PingFang SC" pitchFamily="34" charset="-122"/>
+                <a:cs typeface="PingFang SC" pitchFamily="34" charset="-120"/>
+              </a:rPr>
+              <a:t>2.4x</a:t>
+            </a:r>
+            <a:endParaRPr lang="en-US" sz="1760" dirty="0"/>
+          </a:p>
+        </p:txBody>
+      </p:sp>
+      <p:sp>
+        <p:nvSpPr>
+          <p:cNvPr id="56" name="Text 53"/>
+          <p:cNvSpPr/>
+          <p:nvPr/>
+        </p:nvSpPr>
+        <p:spPr>
+          <a:xfrm>
+            <a:off x="2191512" y="5623560"/>
+            <a:ext cx="1277112" cy="164592"/>
+          </a:xfrm>
+          <a:prstGeom prst="rect">
+            <a:avLst/>
+          </a:prstGeom>
+          <a:noFill/>
+          <a:ln/>
+        </p:spPr>
+        <p:txBody>
+          <a:bodyPr wrap="square" lIns="0" tIns="0" rIns="0" bIns="0" rtlCol="0" anchor="ctr">
+            <a:normAutofit/>
+          </a:bodyPr>
+          <a:lstStyle/>
+          <a:p>
+            <a:pPr indent="0" marL="0">
+              <a:buNone/>
+            </a:pPr>
+            <a:r>
+              <a:rPr lang="en-US" sz="690" b="1" dirty="0">
+                <a:solidFill>
+                  <a:srgbClr val="D8E6F8"/>
+                </a:solidFill>
+                <a:latin typeface="PingFang SC" pitchFamily="34" charset="0"/>
+                <a:ea typeface="PingFang SC" pitchFamily="34" charset="-122"/>
+                <a:cs typeface="PingFang SC" pitchFamily="34" charset="-120"/>
+              </a:rPr>
+              <a:t>协同提效</a:t>
+            </a:r>
+            <a:endParaRPr lang="en-US" sz="690" dirty="0"/>
+          </a:p>
+        </p:txBody>
+      </p:sp>
+      <p:sp>
+        <p:nvSpPr>
+          <p:cNvPr id="57" name="Shape 54"/>
+          <p:cNvSpPr/>
+          <p:nvPr/>
+        </p:nvSpPr>
+        <p:spPr>
+          <a:xfrm>
+            <a:off x="3578352" y="5852160"/>
+            <a:ext cx="471526" cy="0"/>
+          </a:xfrm>
+          <a:prstGeom prst="line">
+            <a:avLst/>
+          </a:prstGeom>
+          <a:noFill/>
+          <a:ln w="12700">
+            <a:solidFill>
+              <a:srgbClr val="16E0B3">
+                <a:alpha val="88000"/>
+              </a:srgbClr>
+            </a:solidFill>
+            <a:prstDash val="solid"/>
+          </a:ln>
+        </p:spPr>
+      </p:sp>
+      <p:sp>
+        <p:nvSpPr>
+          <p:cNvPr id="58" name="Text 55"/>
+          <p:cNvSpPr/>
+          <p:nvPr/>
+        </p:nvSpPr>
+        <p:spPr>
+          <a:xfrm>
+            <a:off x="3578352" y="5266944"/>
+            <a:ext cx="1277112" cy="292608"/>
+          </a:xfrm>
+          <a:prstGeom prst="rect">
+            <a:avLst/>
+          </a:prstGeom>
+          <a:noFill/>
+          <a:ln/>
+        </p:spPr>
+        <p:txBody>
+          <a:bodyPr wrap="square" lIns="0" tIns="0" rIns="0" bIns="0" rtlCol="0" anchor="ctr">
+            <a:normAutofit/>
+          </a:bodyPr>
+          <a:lstStyle/>
+          <a:p>
+            <a:pPr indent="0" marL="0">
+              <a:buNone/>
+            </a:pPr>
+            <a:r>
+              <a:rPr lang="en-US" sz="1760" b="1" dirty="0">
+                <a:solidFill>
+                  <a:srgbClr val="16E0B3"/>
+                </a:solidFill>
+                <a:latin typeface="PingFang SC" pitchFamily="34" charset="0"/>
+                <a:ea typeface="PingFang SC" pitchFamily="34" charset="-122"/>
+                <a:cs typeface="PingFang SC" pitchFamily="34" charset="-120"/>
+              </a:rPr>
+              <a:t>2026</a:t>
+            </a:r>
+            <a:endParaRPr lang="en-US" sz="1760" dirty="0"/>
+          </a:p>
+        </p:txBody>
+      </p:sp>
+      <p:sp>
+        <p:nvSpPr>
+          <p:cNvPr id="59" name="Text 56"/>
+          <p:cNvSpPr/>
+          <p:nvPr/>
+        </p:nvSpPr>
+        <p:spPr>
+          <a:xfrm>
+            <a:off x="3578352" y="5623560"/>
+            <a:ext cx="1277112" cy="164592"/>
+          </a:xfrm>
+          <a:prstGeom prst="rect">
+            <a:avLst/>
+          </a:prstGeom>
+          <a:noFill/>
+          <a:ln/>
+        </p:spPr>
+        <p:txBody>
+          <a:bodyPr wrap="square" lIns="0" tIns="0" rIns="0" bIns="0" rtlCol="0" anchor="ctr">
+            <a:normAutofit/>
+          </a:bodyPr>
+          <a:lstStyle/>
+          <a:p>
+            <a:pPr indent="0" marL="0">
+              <a:buNone/>
+            </a:pPr>
+            <a:r>
+              <a:rPr lang="en-US" sz="690" b="1" dirty="0">
+                <a:solidFill>
+                  <a:srgbClr val="D8E6F8"/>
+                </a:solidFill>
+                <a:latin typeface="PingFang SC" pitchFamily="34" charset="0"/>
+                <a:ea typeface="PingFang SC" pitchFamily="34" charset="-122"/>
+                <a:cs typeface="PingFang SC" pitchFamily="34" charset="-120"/>
+              </a:rPr>
+              <a:t>规模窗口</a:t>
+            </a:r>
+            <a:endParaRPr lang="en-US" sz="690" dirty="0"/>
+          </a:p>
+        </p:txBody>
+      </p:sp>
+      <p:sp>
+        <p:nvSpPr>
+          <p:cNvPr id="60" name="Text 57"/>
           <p:cNvSpPr/>
           <p:nvPr/>
         </p:nvSpPr>
